--- a/pitch/Shotorko-GP-FutureMakers-2026.pptx
+++ b/pitch/Shotorko-GP-FutureMakers-2026.pptx
@@ -6,18 +6,18 @@
   </p:sldMasterIdLst>
   <p:sldIdLst>
     <p:sldId id="256" r:id="rId7"/>
-    <p:sldId id="257" r:id="rId9"/>
-    <p:sldId id="258" r:id="rId10"/>
-    <p:sldId id="259" r:id="rId11"/>
-    <p:sldId id="260" r:id="rId12"/>
-    <p:sldId id="261" r:id="rId13"/>
-    <p:sldId id="262" r:id="rId14"/>
-    <p:sldId id="263" r:id="rId15"/>
-    <p:sldId id="264" r:id="rId16"/>
-    <p:sldId id="265" r:id="rId17"/>
-    <p:sldId id="266" r:id="rId18"/>
-    <p:sldId id="267" r:id="rId19"/>
-    <p:sldId id="268" r:id="rId20"/>
+    <p:sldId id="257" r:id="rId8"/>
+    <p:sldId id="258" r:id="rId9"/>
+    <p:sldId id="259" r:id="rId10"/>
+    <p:sldId id="260" r:id="rId11"/>
+    <p:sldId id="261" r:id="rId12"/>
+    <p:sldId id="262" r:id="rId13"/>
+    <p:sldId id="263" r:id="rId14"/>
+    <p:sldId id="264" r:id="rId15"/>
+    <p:sldId id="265" r:id="rId16"/>
+    <p:sldId id="266" r:id="rId17"/>
+    <p:sldId id="267" r:id="rId18"/>
+    <p:sldId id="268" r:id="rId19"/>
   </p:sldIdLst>
   <p:sldSz cx="12191695" cy="6858000" type="screen4x3"/>
   <p:notesSz cx="6858000" cy="9144000"/>
@@ -117,1409 +117,6 @@
     </a:lvl9pPr>
   </p:defaultTextStyle>
 </p:presentation>
-</file>
-
-<file path=ppt/notesMasters/notesMaster1.xml><?xml version="1.0" encoding="utf-8"?>
-<p:notesMaster xmlns:a="http://schemas.openxmlformats.org/drawingml/2006/main" xmlns:p="http://schemas.openxmlformats.org/presentationml/2006/main" xmlns:r="http://schemas.openxmlformats.org/officeDocument/2006/relationships">
-  <p:cSld>
-    <p:bg>
-      <p:bgRef idx="1001">
-        <a:schemeClr val="bg1"/>
-      </p:bgRef>
-    </p:bg>
-    <p:spTree>
-      <p:nvGrpSpPr>
-        <p:cNvPr id="1" name=""/>
-        <p:cNvGrpSpPr/>
-        <p:nvPr/>
-      </p:nvGrpSpPr>
-      <p:grpSpPr>
-        <a:xfrm>
-          <a:off x="0" y="0"/>
-          <a:ext cx="0" cy="0"/>
-          <a:chOff x="0" y="0"/>
-          <a:chExt cx="0" cy="0"/>
-        </a:xfrm>
-      </p:grpSpPr>
-      <p:sp>
-        <p:nvSpPr>
-          <p:cNvPr id="2" name="Header Placeholder 1"/>
-          <p:cNvSpPr>
-            <a:spLocks noGrp="1"/>
-          </p:cNvSpPr>
-          <p:nvPr>
-            <p:ph type="hdr" sz="quarter"/>
-          </p:nvPr>
-        </p:nvSpPr>
-        <p:spPr>
-          <a:xfrm>
-            <a:off x="0" y="0"/>
-            <a:ext cx="2971800" cy="457200"/>
-          </a:xfrm>
-          <a:prstGeom prst="rect">
-            <a:avLst/>
-          </a:prstGeom>
-        </p:spPr>
-        <p:txBody>
-          <a:bodyPr vert="horz" lIns="91440" tIns="45720" rIns="91440" bIns="45720" rtlCol="0"/>
-          <a:lstStyle>
-            <a:lvl1pPr algn="l">
-              <a:defRPr sz="1200"/>
-            </a:lvl1pPr>
-          </a:lstStyle>
-          <a:p>
-            <a:endParaRPr lang="en-US"/>
-          </a:p>
-        </p:txBody>
-      </p:sp>
-      <p:sp>
-        <p:nvSpPr>
-          <p:cNvPr id="3" name="Date Placeholder 2"/>
-          <p:cNvSpPr>
-            <a:spLocks noGrp="1"/>
-          </p:cNvSpPr>
-          <p:nvPr>
-            <p:ph type="dt" idx="1"/>
-          </p:nvPr>
-        </p:nvSpPr>
-        <p:spPr>
-          <a:xfrm>
-            <a:off x="3884613" y="0"/>
-            <a:ext cx="2971800" cy="457200"/>
-          </a:xfrm>
-          <a:prstGeom prst="rect">
-            <a:avLst/>
-          </a:prstGeom>
-        </p:spPr>
-        <p:txBody>
-          <a:bodyPr vert="horz" lIns="91440" tIns="45720" rIns="91440" bIns="45720" rtlCol="0"/>
-          <a:lstStyle>
-            <a:lvl1pPr algn="r">
-              <a:defRPr sz="1200"/>
-            </a:lvl1pPr>
-          </a:lstStyle>
-          <a:p>
-            <a:fld id="{0F89C1C7-3DCD-1040-A9CF-14679D8B5DDD}" type="datetimeFigureOut">
-              <a:rPr lang="en-US" smtClean="0"/>
-              <a:t>10/17/16</a:t>
-            </a:fld>
-            <a:endParaRPr lang="en-US"/>
-          </a:p>
-        </p:txBody>
-      </p:sp>
-      <p:sp>
-        <p:nvSpPr>
-          <p:cNvPr id="4" name="Slide Image Placeholder 3"/>
-          <p:cNvSpPr>
-            <a:spLocks noGrp="1" noRot="1" noChangeAspect="1"/>
-          </p:cNvSpPr>
-          <p:nvPr>
-            <p:ph type="sldImg" idx="2"/>
-          </p:nvPr>
-        </p:nvSpPr>
-        <p:spPr>
-          <a:xfrm>
-            <a:off x="1143000" y="685800"/>
-            <a:ext cx="4572000" cy="3429000"/>
-          </a:xfrm>
-          <a:prstGeom prst="rect">
-            <a:avLst/>
-          </a:prstGeom>
-          <a:noFill/>
-          <a:ln w="12700">
-            <a:solidFill>
-              <a:prstClr val="black"/>
-            </a:solidFill>
-          </a:ln>
-        </p:spPr>
-        <p:txBody>
-          <a:bodyPr vert="horz" lIns="91440" tIns="45720" rIns="91440" bIns="45720" rtlCol="0" anchor="ctr"/>
-          <a:lstStyle/>
-          <a:p>
-            <a:endParaRPr lang="en-US"/>
-          </a:p>
-        </p:txBody>
-      </p:sp>
-      <p:sp>
-        <p:nvSpPr>
-          <p:cNvPr id="5" name="Notes Placeholder 4"/>
-          <p:cNvSpPr>
-            <a:spLocks noGrp="1"/>
-          </p:cNvSpPr>
-          <p:nvPr>
-            <p:ph type="body" sz="quarter" idx="3"/>
-          </p:nvPr>
-        </p:nvSpPr>
-        <p:spPr>
-          <a:xfrm>
-            <a:off x="685800" y="4343400"/>
-            <a:ext cx="5486400" cy="4114800"/>
-          </a:xfrm>
-          <a:prstGeom prst="rect">
-            <a:avLst/>
-          </a:prstGeom>
-        </p:spPr>
-        <p:txBody>
-          <a:bodyPr vert="horz" lIns="91440" tIns="45720" rIns="91440" bIns="45720" rtlCol="0"/>
-          <a:lstStyle/>
-          <a:p>
-            <a:pPr lvl="0"/>
-            <a:r>
-              <a:rPr lang="en-US" smtClean="0"/>
-              <a:t>Click to edit Master text styles</a:t>
-            </a:r>
-          </a:p>
-          <a:p>
-            <a:pPr lvl="1"/>
-            <a:r>
-              <a:rPr lang="en-US" smtClean="0"/>
-              <a:t>Second level</a:t>
-            </a:r>
-          </a:p>
-          <a:p>
-            <a:pPr lvl="2"/>
-            <a:r>
-              <a:rPr lang="en-US" smtClean="0"/>
-              <a:t>Third level</a:t>
-            </a:r>
-          </a:p>
-          <a:p>
-            <a:pPr lvl="3"/>
-            <a:r>
-              <a:rPr lang="en-US" smtClean="0"/>
-              <a:t>Fourth level</a:t>
-            </a:r>
-          </a:p>
-          <a:p>
-            <a:pPr lvl="4"/>
-            <a:r>
-              <a:rPr lang="en-US" smtClean="0"/>
-              <a:t>Fifth level</a:t>
-            </a:r>
-            <a:endParaRPr lang="en-US"/>
-          </a:p>
-        </p:txBody>
-      </p:sp>
-      <p:sp>
-        <p:nvSpPr>
-          <p:cNvPr id="6" name="Footer Placeholder 5"/>
-          <p:cNvSpPr>
-            <a:spLocks noGrp="1"/>
-          </p:cNvSpPr>
-          <p:nvPr>
-            <p:ph type="ftr" sz="quarter" idx="4"/>
-          </p:nvPr>
-        </p:nvSpPr>
-        <p:spPr>
-          <a:xfrm>
-            <a:off x="0" y="8685213"/>
-            <a:ext cx="2971800" cy="457200"/>
-          </a:xfrm>
-          <a:prstGeom prst="rect">
-            <a:avLst/>
-          </a:prstGeom>
-        </p:spPr>
-        <p:txBody>
-          <a:bodyPr vert="horz" lIns="91440" tIns="45720" rIns="91440" bIns="45720" rtlCol="0" anchor="b"/>
-          <a:lstStyle>
-            <a:lvl1pPr algn="l">
-              <a:defRPr sz="1200"/>
-            </a:lvl1pPr>
-          </a:lstStyle>
-          <a:p>
-            <a:endParaRPr lang="en-US"/>
-          </a:p>
-        </p:txBody>
-      </p:sp>
-      <p:sp>
-        <p:nvSpPr>
-          <p:cNvPr id="7" name="Slide Number Placeholder 6"/>
-          <p:cNvSpPr>
-            <a:spLocks noGrp="1"/>
-          </p:cNvSpPr>
-          <p:nvPr>
-            <p:ph type="sldNum" sz="quarter" idx="5"/>
-          </p:nvPr>
-        </p:nvSpPr>
-        <p:spPr>
-          <a:xfrm>
-            <a:off x="3884613" y="8685213"/>
-            <a:ext cx="2971800" cy="457200"/>
-          </a:xfrm>
-          <a:prstGeom prst="rect">
-            <a:avLst/>
-          </a:prstGeom>
-        </p:spPr>
-        <p:txBody>
-          <a:bodyPr vert="horz" lIns="91440" tIns="45720" rIns="91440" bIns="45720" rtlCol="0" anchor="b"/>
-          <a:lstStyle>
-            <a:lvl1pPr algn="r">
-              <a:defRPr sz="1200"/>
-            </a:lvl1pPr>
-          </a:lstStyle>
-          <a:p>
-            <a:fld id="{BB5E49A5-4136-284D-997B-48E1D791AD67}" type="slidenum">
-              <a:rPr lang="en-US" smtClean="0"/>
-              <a:t>‹#›</a:t>
-            </a:fld>
-            <a:endParaRPr lang="en-US"/>
-          </a:p>
-        </p:txBody>
-      </p:sp>
-    </p:spTree>
-    <p:extLst>
-      <p:ext uri="{BB962C8B-B14F-4D97-AF65-F5344CB8AC3E}">
-        <p14:creationId xmlns:p14="http://schemas.microsoft.com/office/powerpoint/2010/main" val="2623252185"/>
-      </p:ext>
-    </p:extLst>
-  </p:cSld>
-  <p:clrMap bg1="lt1" tx1="dk1" bg2="lt2" tx2="dk2" accent1="accent1" accent2="accent2" accent3="accent3" accent4="accent4" accent5="accent5" accent6="accent6" hlink="hlink" folHlink="folHlink"/>
-  <p:notesStyle>
-    <a:lvl1pPr marL="0" algn="l" defTabSz="457200" rtl="0" eaLnBrk="1" latinLnBrk="0" hangingPunct="1">
-      <a:defRPr sz="1200" kern="1200">
-        <a:solidFill>
-          <a:schemeClr val="tx1"/>
-        </a:solidFill>
-        <a:latin typeface="+mn-lt"/>
-        <a:ea typeface="+mn-ea"/>
-        <a:cs typeface="+mn-cs"/>
-      </a:defRPr>
-    </a:lvl1pPr>
-    <a:lvl2pPr marL="457200" algn="l" defTabSz="457200" rtl="0" eaLnBrk="1" latinLnBrk="0" hangingPunct="1">
-      <a:defRPr sz="1200" kern="1200">
-        <a:solidFill>
-          <a:schemeClr val="tx1"/>
-        </a:solidFill>
-        <a:latin typeface="+mn-lt"/>
-        <a:ea typeface="+mn-ea"/>
-        <a:cs typeface="+mn-cs"/>
-      </a:defRPr>
-    </a:lvl2pPr>
-    <a:lvl3pPr marL="914400" algn="l" defTabSz="457200" rtl="0" eaLnBrk="1" latinLnBrk="0" hangingPunct="1">
-      <a:defRPr sz="1200" kern="1200">
-        <a:solidFill>
-          <a:schemeClr val="tx1"/>
-        </a:solidFill>
-        <a:latin typeface="+mn-lt"/>
-        <a:ea typeface="+mn-ea"/>
-        <a:cs typeface="+mn-cs"/>
-      </a:defRPr>
-    </a:lvl3pPr>
-    <a:lvl4pPr marL="1371600" algn="l" defTabSz="457200" rtl="0" eaLnBrk="1" latinLnBrk="0" hangingPunct="1">
-      <a:defRPr sz="1200" kern="1200">
-        <a:solidFill>
-          <a:schemeClr val="tx1"/>
-        </a:solidFill>
-        <a:latin typeface="+mn-lt"/>
-        <a:ea typeface="+mn-ea"/>
-        <a:cs typeface="+mn-cs"/>
-      </a:defRPr>
-    </a:lvl4pPr>
-    <a:lvl5pPr marL="1828800" algn="l" defTabSz="457200" rtl="0" eaLnBrk="1" latinLnBrk="0" hangingPunct="1">
-      <a:defRPr sz="1200" kern="1200">
-        <a:solidFill>
-          <a:schemeClr val="tx1"/>
-        </a:solidFill>
-        <a:latin typeface="+mn-lt"/>
-        <a:ea typeface="+mn-ea"/>
-        <a:cs typeface="+mn-cs"/>
-      </a:defRPr>
-    </a:lvl5pPr>
-    <a:lvl6pPr marL="2286000" algn="l" defTabSz="457200" rtl="0" eaLnBrk="1" latinLnBrk="0" hangingPunct="1">
-      <a:defRPr sz="1200" kern="1200">
-        <a:solidFill>
-          <a:schemeClr val="tx1"/>
-        </a:solidFill>
-        <a:latin typeface="+mn-lt"/>
-        <a:ea typeface="+mn-ea"/>
-        <a:cs typeface="+mn-cs"/>
-      </a:defRPr>
-    </a:lvl6pPr>
-    <a:lvl7pPr marL="2743200" algn="l" defTabSz="457200" rtl="0" eaLnBrk="1" latinLnBrk="0" hangingPunct="1">
-      <a:defRPr sz="1200" kern="1200">
-        <a:solidFill>
-          <a:schemeClr val="tx1"/>
-        </a:solidFill>
-        <a:latin typeface="+mn-lt"/>
-        <a:ea typeface="+mn-ea"/>
-        <a:cs typeface="+mn-cs"/>
-      </a:defRPr>
-    </a:lvl7pPr>
-    <a:lvl8pPr marL="3200400" algn="l" defTabSz="457200" rtl="0" eaLnBrk="1" latinLnBrk="0" hangingPunct="1">
-      <a:defRPr sz="1200" kern="1200">
-        <a:solidFill>
-          <a:schemeClr val="tx1"/>
-        </a:solidFill>
-        <a:latin typeface="+mn-lt"/>
-        <a:ea typeface="+mn-ea"/>
-        <a:cs typeface="+mn-cs"/>
-      </a:defRPr>
-    </a:lvl8pPr>
-    <a:lvl9pPr marL="3657600" algn="l" defTabSz="457200" rtl="0" eaLnBrk="1" latinLnBrk="0" hangingPunct="1">
-      <a:defRPr sz="1200" kern="1200">
-        <a:solidFill>
-          <a:schemeClr val="tx1"/>
-        </a:solidFill>
-        <a:latin typeface="+mn-lt"/>
-        <a:ea typeface="+mn-ea"/>
-        <a:cs typeface="+mn-cs"/>
-      </a:defRPr>
-    </a:lvl9pPr>
-  </p:notesStyle>
-</p:notesMaster>
-</file>
-
-<file path=ppt/notesSlides/notesSlide1.xml><?xml version="1.0" encoding="utf-8"?>
-<p:notes xmlns:a="http://schemas.openxmlformats.org/drawingml/2006/main" xmlns:p="http://schemas.openxmlformats.org/presentationml/2006/main" xmlns:r="http://schemas.openxmlformats.org/officeDocument/2006/relationships">
-  <p:cSld>
-    <p:spTree>
-      <p:nvGrpSpPr>
-        <p:cNvPr id="1" name=""/>
-        <p:cNvGrpSpPr/>
-        <p:nvPr/>
-      </p:nvGrpSpPr>
-      <p:grpSpPr>
-        <a:xfrm>
-          <a:off x="0" y="0"/>
-          <a:ext cx="0" cy="0"/>
-          <a:chOff x="0" y="0"/>
-          <a:chExt cx="0" cy="0"/>
-        </a:xfrm>
-      </p:grpSpPr>
-      <p:sp>
-        <p:nvSpPr>
-          <p:cNvPr id="2" name="Slide Image Placeholder 1"/>
-          <p:cNvSpPr>
-            <a:spLocks noGrp="1"/>
-          </p:cNvSpPr>
-          <p:nvPr>
-            <p:ph type="sldImg" idx="2"/>
-          </p:nvPr>
-        </p:nvSpPr>
-        <p:spPr/>
-      </p:sp>
-      <p:sp>
-        <p:nvSpPr>
-          <p:cNvPr id="3" name="Notes Placeholder 2"/>
-          <p:cNvSpPr>
-            <a:spLocks noGrp="1"/>
-          </p:cNvSpPr>
-          <p:nvPr>
-            <p:ph type="body" idx="3" sz="quarter"/>
-          </p:nvPr>
-        </p:nvSpPr>
-        <p:spPr/>
-        <p:txBody>
-          <a:bodyPr/>
-          <a:lstStyle/>
-          <a:p>
-            <a:r>
-              <a:t>Shotorko means *be alert*. One sentence: a phone scam only works for about ninety seconds, and this is built to win those ninety seconds on the cheapest phone in the room. Everything you will see screenshotted in this deck is a real capture of a working prototype, and you can open it yourself at the end.</a:t>
-            </a:r>
-          </a:p>
-          <a:p/>
-          <a:p>
-            <a:r>
-              <a:t>— Scoring: Clarity — the whole promise in three words, and the prototype named on the first screen</a:t>
-            </a:r>
-          </a:p>
-          <a:p>
-            <a:r>
-              <a:t>— If asked: Q&amp;A 11 — isn't this a feature? The loop is the product, not the screen.</a:t>
-            </a:r>
-          </a:p>
-        </p:txBody>
-      </p:sp>
-      <p:sp>
-        <p:nvSpPr>
-          <p:cNvPr id="4" name="Slide Number Placeholder 3"/>
-          <p:cNvSpPr>
-            <a:spLocks noGrp="1"/>
-          </p:cNvSpPr>
-          <p:nvPr>
-            <p:ph type="sldNum" idx="5" sz="quarter"/>
-          </p:nvPr>
-        </p:nvSpPr>
-        <p:spPr/>
-      </p:sp>
-    </p:spTree>
-  </p:cSld>
-  <p:clrMapOvr>
-    <a:masterClrMapping/>
-  </p:clrMapOvr>
-</p:notes>
-</file>
-
-<file path=ppt/notesSlides/notesSlide10.xml><?xml version="1.0" encoding="utf-8"?>
-<p:notes xmlns:a="http://schemas.openxmlformats.org/drawingml/2006/main" xmlns:p="http://schemas.openxmlformats.org/presentationml/2006/main" xmlns:r="http://schemas.openxmlformats.org/officeDocument/2006/relationships">
-  <p:cSld>
-    <p:spTree>
-      <p:nvGrpSpPr>
-        <p:cNvPr id="1" name=""/>
-        <p:cNvGrpSpPr/>
-        <p:nvPr/>
-      </p:nvGrpSpPr>
-      <p:grpSpPr>
-        <a:xfrm>
-          <a:off x="0" y="0"/>
-          <a:ext cx="0" cy="0"/>
-          <a:chOff x="0" y="0"/>
-          <a:chExt cx="0" cy="0"/>
-        </a:xfrm>
-      </p:grpSpPr>
-      <p:sp>
-        <p:nvSpPr>
-          <p:cNvPr id="2" name="Slide Image Placeholder 1"/>
-          <p:cNvSpPr>
-            <a:spLocks noGrp="1"/>
-          </p:cNvSpPr>
-          <p:nvPr>
-            <p:ph type="sldImg" idx="2"/>
-          </p:nvPr>
-        </p:nvSpPr>
-        <p:spPr/>
-      </p:sp>
-      <p:sp>
-        <p:nvSpPr>
-          <p:cNvPr id="3" name="Notes Placeholder 2"/>
-          <p:cNvSpPr>
-            <a:spLocks noGrp="1"/>
-          </p:cNvSpPr>
-          <p:nvPr>
-            <p:ph type="body" idx="3" sz="quarter"/>
-          </p:nvPr>
-        </p:nvSpPr>
-        <p:spPr/>
-        <p:txBody>
-          <a:bodyPr/>
-          <a:lstStyle/>
-          <a:p>
-            <a:r>
-              <a:t>Three things change: the money stays with the person least able to lose it, a victim's spoken story becomes a filed record instead of a family argument, and trust in digital finance stays inside Grameenphone. To find out whether that is real I need four things — the fraud cell's recordings, one announcement slot, one USSD gating test, and a district for ninety days. Everything you saw screenshotted is live on this address right now. The on-device engine answers with no network at all, and flip to Live agent to watch the same sentence judged by a hosted model. Thank you.</a:t>
-            </a:r>
-          </a:p>
-          <a:p/>
-          <a:p>
-            <a:r>
-              <a:t>— Scoring: Clarity &amp; impact — the claim, the ask and the proof are all on one page the judges can open</a:t>
-            </a:r>
-          </a:p>
-          <a:p>
-            <a:r>
-              <a:t>— If asked: Q&amp;A 23 — what would make us stop: if four weeks of real speech can't hold the false-positive rate, the pause is dropped and the network layer ships alone.</a:t>
-            </a:r>
-          </a:p>
-        </p:txBody>
-      </p:sp>
-      <p:sp>
-        <p:nvSpPr>
-          <p:cNvPr id="4" name="Slide Number Placeholder 3"/>
-          <p:cNvSpPr>
-            <a:spLocks noGrp="1"/>
-          </p:cNvSpPr>
-          <p:nvPr>
-            <p:ph type="sldNum" idx="5" sz="quarter"/>
-          </p:nvPr>
-        </p:nvSpPr>
-        <p:spPr/>
-      </p:sp>
-    </p:spTree>
-  </p:cSld>
-  <p:clrMapOvr>
-    <a:masterClrMapping/>
-  </p:clrMapOvr>
-</p:notes>
-</file>
-
-<file path=ppt/notesSlides/notesSlide11.xml><?xml version="1.0" encoding="utf-8"?>
-<p:notes xmlns:a="http://schemas.openxmlformats.org/drawingml/2006/main" xmlns:p="http://schemas.openxmlformats.org/presentationml/2006/main" xmlns:r="http://schemas.openxmlformats.org/officeDocument/2006/relationships">
-  <p:cSld>
-    <p:spTree>
-      <p:nvGrpSpPr>
-        <p:cNvPr id="1" name=""/>
-        <p:cNvGrpSpPr/>
-        <p:nvPr/>
-      </p:nvGrpSpPr>
-      <p:grpSpPr>
-        <a:xfrm>
-          <a:off x="0" y="0"/>
-          <a:ext cx="0" cy="0"/>
-          <a:chOff x="0" y="0"/>
-          <a:chExt cx="0" cy="0"/>
-        </a:xfrm>
-      </p:grpSpPr>
-      <p:sp>
-        <p:nvSpPr>
-          <p:cNvPr id="2" name="Slide Image Placeholder 1"/>
-          <p:cNvSpPr>
-            <a:spLocks noGrp="1"/>
-          </p:cNvSpPr>
-          <p:nvPr>
-            <p:ph type="sldImg" idx="2"/>
-          </p:nvPr>
-        </p:nvSpPr>
-        <p:spPr/>
-      </p:sp>
-      <p:sp>
-        <p:nvSpPr>
-          <p:cNvPr id="3" name="Notes Placeholder 2"/>
-          <p:cNvSpPr>
-            <a:spLocks noGrp="1"/>
-          </p:cNvSpPr>
-          <p:nvPr>
-            <p:ph type="body" idx="3" sz="quarter"/>
-          </p:nvPr>
-        </p:nvSpPr>
-        <p:spPr/>
-        <p:txBody>
-          <a:bodyPr/>
-          <a:lstStyle/>
-          <a:p>
-            <a:r>
-              <a:t>[only if a number is challenged] Two primary sources carry every market number in this deck: Bangladesh Bank's MFS statistics for July 2026, and BTRC's subscriber and penetration tables for August 2026. The behavioural benchmarks are Truecaller's published subscriber count and conversion rate, and Verizon's published price. The FTC figure is there to show the category, not the market — it is American. Anything marked calculated is arithmetic on those tables, and the price and attach rate are ours, which is the first thing I would want tested in a pilot.</a:t>
-            </a:r>
-          </a:p>
-          <a:p/>
-          <a:p>
-            <a:r>
-              <a:t>— Scoring: Credibility — every number traces to a named publication and date, and the gaps are stated out loud</a:t>
-            </a:r>
-          </a:p>
-          <a:p>
-            <a:r>
-              <a:t>— If asked: Any number a judge challenges — name the publication, the month, and what is calculated rather than published.</a:t>
-            </a:r>
-          </a:p>
-        </p:txBody>
-      </p:sp>
-      <p:sp>
-        <p:nvSpPr>
-          <p:cNvPr id="4" name="Slide Number Placeholder 3"/>
-          <p:cNvSpPr>
-            <a:spLocks noGrp="1"/>
-          </p:cNvSpPr>
-          <p:nvPr>
-            <p:ph type="sldNum" idx="5" sz="quarter"/>
-          </p:nvPr>
-        </p:nvSpPr>
-        <p:spPr/>
-      </p:sp>
-    </p:spTree>
-  </p:cSld>
-  <p:clrMapOvr>
-    <a:masterClrMapping/>
-  </p:clrMapOvr>
-</p:notes>
-</file>
-
-<file path=ppt/notesSlides/notesSlide12.xml><?xml version="1.0" encoding="utf-8"?>
-<p:notes xmlns:a="http://schemas.openxmlformats.org/drawingml/2006/main" xmlns:p="http://schemas.openxmlformats.org/presentationml/2006/main" xmlns:r="http://schemas.openxmlformats.org/officeDocument/2006/relationships">
-  <p:cSld>
-    <p:spTree>
-      <p:nvGrpSpPr>
-        <p:cNvPr id="1" name=""/>
-        <p:cNvGrpSpPr/>
-        <p:nvPr/>
-      </p:nvGrpSpPr>
-      <p:grpSpPr>
-        <a:xfrm>
-          <a:off x="0" y="0"/>
-          <a:ext cx="0" cy="0"/>
-          <a:chOff x="0" y="0"/>
-          <a:chExt cx="0" cy="0"/>
-        </a:xfrm>
-      </p:grpSpPr>
-      <p:sp>
-        <p:nvSpPr>
-          <p:cNvPr id="2" name="Slide Image Placeholder 1"/>
-          <p:cNvSpPr>
-            <a:spLocks noGrp="1"/>
-          </p:cNvSpPr>
-          <p:nvPr>
-            <p:ph type="sldImg" idx="2"/>
-          </p:nvPr>
-        </p:nvSpPr>
-        <p:spPr/>
-      </p:sp>
-      <p:sp>
-        <p:nvSpPr>
-          <p:cNvPr id="3" name="Notes Placeholder 2"/>
-          <p:cNvSpPr>
-            <a:spLocks noGrp="1"/>
-          </p:cNvSpPr>
-          <p:nvPr>
-            <p:ph type="body" idx="3" sz="quarter"/>
-          </p:nvPr>
-        </p:nvSpPr>
-        <p:spPr/>
-        <p:txBody>
-          <a:bodyPr/>
-          <a:lstStyle/>
-          <a:p>
-            <a:r>
-              <a:t>The revenue case is linear in attach rate, so the only assumption worth arguing about is that rate: half a percent is 105 million taka, three percent is 628 million. Cost does not scale with it, because the classifier is inference the handset already pays for; the cloud is only in the complaint letter, which the user starts. That is why the margin survives a hundredfold in volume — the thing that breaks at scale is trust in the alert, not the infrastructure.</a:t>
-            </a:r>
-          </a:p>
-          <a:p/>
-          <a:p>
-            <a:r>
-              <a:t>— Scoring: Feasibility &amp; business sense — the sensitivity of the revenue case, and the cost structure behind the margin</a:t>
-            </a:r>
-          </a:p>
-          <a:p>
-            <a:r>
-              <a:t>— If asked: Q&amp;A 8, 16 and 17 — cost to serve, the price point, and why the on-device engine is a margin argument as well as a coverage one.</a:t>
-            </a:r>
-          </a:p>
-        </p:txBody>
-      </p:sp>
-      <p:sp>
-        <p:nvSpPr>
-          <p:cNvPr id="4" name="Slide Number Placeholder 3"/>
-          <p:cNvSpPr>
-            <a:spLocks noGrp="1"/>
-          </p:cNvSpPr>
-          <p:nvPr>
-            <p:ph type="sldNum" idx="5" sz="quarter"/>
-          </p:nvPr>
-        </p:nvSpPr>
-        <p:spPr/>
-      </p:sp>
-    </p:spTree>
-  </p:cSld>
-  <p:clrMapOvr>
-    <a:masterClrMapping/>
-  </p:clrMapOvr>
-</p:notes>
-</file>
-
-<file path=ppt/notesSlides/notesSlide13.xml><?xml version="1.0" encoding="utf-8"?>
-<p:notes xmlns:a="http://schemas.openxmlformats.org/drawingml/2006/main" xmlns:p="http://schemas.openxmlformats.org/presentationml/2006/main" xmlns:r="http://schemas.openxmlformats.org/officeDocument/2006/relationships">
-  <p:cSld>
-    <p:spTree>
-      <p:nvGrpSpPr>
-        <p:cNvPr id="1" name=""/>
-        <p:cNvGrpSpPr/>
-        <p:nvPr/>
-      </p:nvGrpSpPr>
-      <p:grpSpPr>
-        <a:xfrm>
-          <a:off x="0" y="0"/>
-          <a:ext cx="0" cy="0"/>
-          <a:chOff x="0" y="0"/>
-          <a:chExt cx="0" cy="0"/>
-        </a:xfrm>
-      </p:grpSpPr>
-      <p:sp>
-        <p:nvSpPr>
-          <p:cNvPr id="2" name="Slide Image Placeholder 1"/>
-          <p:cNvSpPr>
-            <a:spLocks noGrp="1"/>
-          </p:cNvSpPr>
-          <p:nvPr>
-            <p:ph type="sldImg" idx="2"/>
-          </p:nvPr>
-        </p:nvSpPr>
-        <p:spPr/>
-      </p:sp>
-      <p:sp>
-        <p:nvSpPr>
-          <p:cNvPr id="3" name="Notes Placeholder 2"/>
-          <p:cNvSpPr>
-            <a:spLocks noGrp="1"/>
-          </p:cNvSpPr>
-          <p:nvPr>
-            <p:ph type="body" idx="3" sz="quarter"/>
-          </p:nvPr>
-        </p:nvSpPr>
-        <p:spPr/>
-        <p:txBody>
-          <a:bodyPr/>
-          <a:lstStyle/>
-          <a:p>
-            <a:r>
-              <a:t>[reference slide — not presented] This page is the answer sheet. The rule for the three minutes: the direct answer first, then the honest limit, then what would change the answer. Never quote the demo dashboard as if it were a field trial, and never quote the hosted battery while Google's free quota is throttling — the on-device numbers are the ones on the slide because they are the ones that re-run identically anywhere.</a:t>
-            </a:r>
-          </a:p>
-          <a:p/>
-          <a:p>
-            <a:r>
-              <a:t>— Scoring: Q&amp;A handling — the market questions taken in advance, answered in one line each</a:t>
-            </a:r>
-          </a:p>
-          <a:p>
-            <a:r>
-              <a:t>— If asked: This slide is the Q&amp;A sheet itself; the full bank is in pitch/deck-and-qa.md.</a:t>
-            </a:r>
-          </a:p>
-        </p:txBody>
-      </p:sp>
-      <p:sp>
-        <p:nvSpPr>
-          <p:cNvPr id="4" name="Slide Number Placeholder 3"/>
-          <p:cNvSpPr>
-            <a:spLocks noGrp="1"/>
-          </p:cNvSpPr>
-          <p:nvPr>
-            <p:ph type="sldNum" idx="5" sz="quarter"/>
-          </p:nvPr>
-        </p:nvSpPr>
-        <p:spPr/>
-      </p:sp>
-    </p:spTree>
-  </p:cSld>
-  <p:clrMapOvr>
-    <a:masterClrMapping/>
-  </p:clrMapOvr>
-</p:notes>
-</file>
-
-<file path=ppt/notesSlides/notesSlide2.xml><?xml version="1.0" encoding="utf-8"?>
-<p:notes xmlns:a="http://schemas.openxmlformats.org/drawingml/2006/main" xmlns:p="http://schemas.openxmlformats.org/presentationml/2006/main" xmlns:r="http://schemas.openxmlformats.org/officeDocument/2006/relationships">
-  <p:cSld>
-    <p:spTree>
-      <p:nvGrpSpPr>
-        <p:cNvPr id="1" name=""/>
-        <p:cNvGrpSpPr/>
-        <p:nvPr/>
-      </p:nvGrpSpPr>
-      <p:grpSpPr>
-        <a:xfrm>
-          <a:off x="0" y="0"/>
-          <a:ext cx="0" cy="0"/>
-          <a:chOff x="0" y="0"/>
-          <a:chExt cx="0" cy="0"/>
-        </a:xfrm>
-      </p:grpSpPr>
-      <p:sp>
-        <p:nvSpPr>
-          <p:cNvPr id="2" name="Slide Image Placeholder 1"/>
-          <p:cNvSpPr>
-            <a:spLocks noGrp="1"/>
-          </p:cNvSpPr>
-          <p:nvPr>
-            <p:ph type="sldImg" idx="2"/>
-          </p:nvPr>
-        </p:nvSpPr>
-        <p:spPr/>
-      </p:sp>
-      <p:sp>
-        <p:nvSpPr>
-          <p:cNvPr id="3" name="Notes Placeholder 2"/>
-          <p:cNvSpPr>
-            <a:spLocks noGrp="1"/>
-          </p:cNvSpPr>
-          <p:nvPr>
-            <p:ph type="body" idx="3" sz="quarter"/>
-          </p:nvPr>
-        </p:nvSpPr>
-        <p:spPr/>
-        <p:txBody>
-          <a:bodyPr/>
-          <a:lstStyle/>
-          <a:p>
-            <a:r>
-              <a:t>Not ignorance — timing. The scam is not a knowledge problem; the victim is not stupid. Fear, urgency and a demand for secrecy arrive together, and that combination shuts down the part of the brain that checks. Look at the clock on the right: three minutes from the first sentence to the money leaving, and two days until the number is dead. Nobody — not the bank, not the family, not the network — is in that three minutes. That window is the product.</a:t>
-            </a:r>
-          </a:p>
-          <a:p/>
-          <a:p>
-            <a:r>
-              <a:t>— Scoring: Depth of problem understanding — the mechanism of the scam — fear, urgency and silence arriving together — not the fact that scams exist</a:t>
-            </a:r>
-          </a:p>
-          <a:p>
-            <a:r>
-              <a:t>— If asked: Q&amp;A 13 — Google and Samsung already do this: they need the right handset and a supported language.</a:t>
-            </a:r>
-          </a:p>
-        </p:txBody>
-      </p:sp>
-      <p:sp>
-        <p:nvSpPr>
-          <p:cNvPr id="4" name="Slide Number Placeholder 3"/>
-          <p:cNvSpPr>
-            <a:spLocks noGrp="1"/>
-          </p:cNvSpPr>
-          <p:nvPr>
-            <p:ph type="sldNum" idx="5" sz="quarter"/>
-          </p:nvPr>
-        </p:nvSpPr>
-        <p:spPr/>
-      </p:sp>
-    </p:spTree>
-  </p:cSld>
-  <p:clrMapOvr>
-    <a:masterClrMapping/>
-  </p:clrMapOvr>
-</p:notes>
-</file>
-
-<file path=ppt/notesSlides/notesSlide3.xml><?xml version="1.0" encoding="utf-8"?>
-<p:notes xmlns:a="http://schemas.openxmlformats.org/drawingml/2006/main" xmlns:p="http://schemas.openxmlformats.org/presentationml/2006/main" xmlns:r="http://schemas.openxmlformats.org/officeDocument/2006/relationships">
-  <p:cSld>
-    <p:spTree>
-      <p:nvGrpSpPr>
-        <p:cNvPr id="1" name=""/>
-        <p:cNvGrpSpPr/>
-        <p:nvPr/>
-      </p:nvGrpSpPr>
-      <p:grpSpPr>
-        <a:xfrm>
-          <a:off x="0" y="0"/>
-          <a:ext cx="0" cy="0"/>
-          <a:chOff x="0" y="0"/>
-          <a:chExt cx="0" cy="0"/>
-        </a:xfrm>
-      </p:grpSpPr>
-      <p:sp>
-        <p:nvSpPr>
-          <p:cNvPr id="2" name="Slide Image Placeholder 1"/>
-          <p:cNvSpPr>
-            <a:spLocks noGrp="1"/>
-          </p:cNvSpPr>
-          <p:nvPr>
-            <p:ph type="sldImg" idx="2"/>
-          </p:nvPr>
-        </p:nvSpPr>
-        <p:spPr/>
-      </p:sp>
-      <p:sp>
-        <p:nvSpPr>
-          <p:cNvPr id="3" name="Notes Placeholder 2"/>
-          <p:cNvSpPr>
-            <a:spLocks noGrp="1"/>
-          </p:cNvSpPr>
-          <p:nvPr>
-            <p:ph type="body" idx="3" sz="quarter"/>
-          </p:nvPr>
-        </p:nvSpPr>
-        <p:spPr/>
-        <p:txBody>
-          <a:bodyPr/>
-          <a:lstStyle/>
-          <a:p>
-            <a:r>
-              <a:t>Each of these is a real control, and each has a specific reason it misses this case. The important asymmetry: the bank sees a transaction and the operator sees a call, and nobody sees the moment a person is being frightened into pressing buttons. And note the last row — the handset most exposed is the one no app can protect, which is why an app company cannot solve this and an operator can.</a:t>
-            </a:r>
-          </a:p>
-          <a:p/>
-          <a:p>
-            <a:r>
-              <a:t>— Scoring: Depth of problem understanding &amp; differentiation — knowing exactly why each existing control misses this case</a:t>
-            </a:r>
-          </a:p>
-          <a:p>
-            <a:r>
-              <a:t>— If asked: Q&amp;A 6 — can you really inject before the ring? An operator capability, with an honest weaker fallback.</a:t>
-            </a:r>
-          </a:p>
-        </p:txBody>
-      </p:sp>
-      <p:sp>
-        <p:nvSpPr>
-          <p:cNvPr id="4" name="Slide Number Placeholder 3"/>
-          <p:cNvSpPr>
-            <a:spLocks noGrp="1"/>
-          </p:cNvSpPr>
-          <p:nvPr>
-            <p:ph type="sldNum" idx="5" sz="quarter"/>
-          </p:nvPr>
-        </p:nvSpPr>
-        <p:spPr/>
-      </p:sp>
-    </p:spTree>
-  </p:cSld>
-  <p:clrMapOvr>
-    <a:masterClrMapping/>
-  </p:clrMapOvr>
-</p:notes>
-</file>
-
-<file path=ppt/notesSlides/notesSlide4.xml><?xml version="1.0" encoding="utf-8"?>
-<p:notes xmlns:a="http://schemas.openxmlformats.org/drawingml/2006/main" xmlns:p="http://schemas.openxmlformats.org/presentationml/2006/main" xmlns:r="http://schemas.openxmlformats.org/officeDocument/2006/relationships">
-  <p:cSld>
-    <p:spTree>
-      <p:nvGrpSpPr>
-        <p:cNvPr id="1" name=""/>
-        <p:cNvGrpSpPr/>
-        <p:nvPr/>
-      </p:nvGrpSpPr>
-      <p:grpSpPr>
-        <a:xfrm>
-          <a:off x="0" y="0"/>
-          <a:ext cx="0" cy="0"/>
-          <a:chOff x="0" y="0"/>
-          <a:chExt cx="0" cy="0"/>
-        </a:xfrm>
-      </p:grpSpPr>
-      <p:sp>
-        <p:nvSpPr>
-          <p:cNvPr id="2" name="Slide Image Placeholder 1"/>
-          <p:cNvSpPr>
-            <a:spLocks noGrp="1"/>
-          </p:cNvSpPr>
-          <p:nvPr>
-            <p:ph type="sldImg" idx="2"/>
-          </p:nvPr>
-        </p:nvSpPr>
-        <p:spPr/>
-      </p:sp>
-      <p:sp>
-        <p:nvSpPr>
-          <p:cNvPr id="3" name="Notes Placeholder 2"/>
-          <p:cNvSpPr>
-            <a:spLocks noGrp="1"/>
-          </p:cNvSpPr>
-          <p:nvPr>
-            <p:ph type="body" idx="3" sz="quarter"/>
-          </p:nvPr>
-        </p:nvSpPr>
-        <p:spPr/>
-        <p:txBody>
-          <a:bodyPr/>
-          <a:lstStyle/>
-          <a:p>
-            <a:r>
-              <a:t>This is the surface we are selling into, and it is published, not estimated. Bangladesh Bank recorded 1.03 billion mobile-financial-services transactions worth 2.17 trillion taka in July alone, on 258.7 million accounts — and more than half of those accounts are rural. BTRC counts 191 million mobile subscribers, 87.2 million of them Grameenphone. The business line at the bottom is the one to remember: the person who loses the money is not the person who buys the protection. Grameenphone buys it because 182.7 billion taka of e-money float is trust, and trust is the product.</a:t>
-            </a:r>
-          </a:p>
-          <a:p/>
-          <a:p>
-            <a:r>
-              <a:t>— Scoring: Impact &amp; market understanding — the measured size of the money that moves digitally, from primary sources</a:t>
-            </a:r>
-          </a:p>
-          <a:p>
-            <a:r>
-              <a:t>— If asked: Q&amp;A 14 — how big is this really: Appendix A1 for the denominators, A2 for the attach-rate ladder.</a:t>
-            </a:r>
-          </a:p>
-        </p:txBody>
-      </p:sp>
-      <p:sp>
-        <p:nvSpPr>
-          <p:cNvPr id="4" name="Slide Number Placeholder 3"/>
-          <p:cNvSpPr>
-            <a:spLocks noGrp="1"/>
-          </p:cNvSpPr>
-          <p:nvPr>
-            <p:ph type="sldNum" idx="5" sz="quarter"/>
-          </p:nvPr>
-        </p:nvSpPr>
-        <p:spPr/>
-      </p:sp>
-    </p:spTree>
-  </p:cSld>
-  <p:clrMapOvr>
-    <a:masterClrMapping/>
-  </p:clrMapOvr>
-</p:notes>
-</file>
-
-<file path=ppt/notesSlides/notesSlide5.xml><?xml version="1.0" encoding="utf-8"?>
-<p:notes xmlns:a="http://schemas.openxmlformats.org/drawingml/2006/main" xmlns:p="http://schemas.openxmlformats.org/presentationml/2006/main" xmlns:r="http://schemas.openxmlformats.org/officeDocument/2006/relationships">
-  <p:cSld>
-    <p:spTree>
-      <p:nvGrpSpPr>
-        <p:cNvPr id="1" name=""/>
-        <p:cNvGrpSpPr/>
-        <p:nvPr/>
-      </p:nvGrpSpPr>
-      <p:grpSpPr>
-        <a:xfrm>
-          <a:off x="0" y="0"/>
-          <a:ext cx="0" cy="0"/>
-          <a:chOff x="0" y="0"/>
-          <a:chExt cx="0" cy="0"/>
-        </a:xfrm>
-      </p:grpSpPr>
-      <p:sp>
-        <p:nvSpPr>
-          <p:cNvPr id="2" name="Slide Image Placeholder 1"/>
-          <p:cNvSpPr>
-            <a:spLocks noGrp="1"/>
-          </p:cNvSpPr>
-          <p:nvPr>
-            <p:ph type="sldImg" idx="2"/>
-          </p:nvPr>
-        </p:nvSpPr>
-        <p:spPr/>
-      </p:sp>
-      <p:sp>
-        <p:nvSpPr>
-          <p:cNvPr id="3" name="Notes Placeholder 2"/>
-          <p:cNvSpPr>
-            <a:spLocks noGrp="1"/>
-          </p:cNvSpPr>
-          <p:nvPr>
-            <p:ph type="body" idx="3" sz="quarter"/>
-          </p:nvPr>
-        </p:nvSpPr>
-        <p:spPr/>
-        <p:txBody>
-          <a:bodyPr/>
-          <a:lstStyle/>
-          <a:p>
-            <a:r>
-              <a:t>One continuous defence, four moments. Before the call, one Bangla sentence plays in the network before the phone rings — no app, no install, no smartphone. During the call, the handset understands intent and nothing is recorded. At the moment money or a code is about to move, the pause. And after, a spoken Bangla story becomes a complaint that can actually be filed, which feeds a radar that clusters numbers into the networks behind them. Two of those four need no software on the handset at all — that is the reach argument, and it is the reason the pilot can protect a button phone on day one.</a:t>
-            </a:r>
-          </a:p>
-          <a:p/>
-          <a:p>
-            <a:r>
-              <a:t>— Scoring: Solution strength — four moments of one continuous defence, two of which need no handset at all</a:t>
-            </a:r>
-          </a:p>
-          <a:p>
-            <a:r>
-              <a:t>— If asked: Q&amp;A 5 — what does the model see? Nothing is stored; opt out of call listening and two layers still work.</a:t>
-            </a:r>
-          </a:p>
-        </p:txBody>
-      </p:sp>
-      <p:sp>
-        <p:nvSpPr>
-          <p:cNvPr id="4" name="Slide Number Placeholder 3"/>
-          <p:cNvSpPr>
-            <a:spLocks noGrp="1"/>
-          </p:cNvSpPr>
-          <p:nvPr>
-            <p:ph type="sldNum" idx="5" sz="quarter"/>
-          </p:nvPr>
-        </p:nvSpPr>
-        <p:spPr/>
-      </p:sp>
-    </p:spTree>
-  </p:cSld>
-  <p:clrMapOvr>
-    <a:masterClrMapping/>
-  </p:clrMapOvr>
-</p:notes>
-</file>
-
-<file path=ppt/notesSlides/notesSlide6.xml><?xml version="1.0" encoding="utf-8"?>
-<p:notes xmlns:a="http://schemas.openxmlformats.org/drawingml/2006/main" xmlns:p="http://schemas.openxmlformats.org/presentationml/2006/main" xmlns:r="http://schemas.openxmlformats.org/officeDocument/2006/relationships">
-  <p:cSld>
-    <p:spTree>
-      <p:nvGrpSpPr>
-        <p:cNvPr id="1" name=""/>
-        <p:cNvGrpSpPr/>
-        <p:nvPr/>
-      </p:nvGrpSpPr>
-      <p:grpSpPr>
-        <a:xfrm>
-          <a:off x="0" y="0"/>
-          <a:ext cx="0" cy="0"/>
-          <a:chOff x="0" y="0"/>
-          <a:chExt cx="0" cy="0"/>
-        </a:xfrm>
-      </p:grpSpPr>
-      <p:sp>
-        <p:nvSpPr>
-          <p:cNvPr id="2" name="Slide Image Placeholder 1"/>
-          <p:cNvSpPr>
-            <a:spLocks noGrp="1"/>
-          </p:cNvSpPr>
-          <p:nvPr>
-            <p:ph type="sldImg" idx="2"/>
-          </p:nvPr>
-        </p:nvSpPr>
-        <p:spPr/>
-      </p:sp>
-      <p:sp>
-        <p:nvSpPr>
-          <p:cNvPr id="3" name="Notes Placeholder 2"/>
-          <p:cNvSpPr>
-            <a:spLocks noGrp="1"/>
-          </p:cNvSpPr>
-          <p:nvPr>
-            <p:ph type="body" idx="3" sz="quarter"/>
-          </p:nvPr>
-        </p:nvSpPr>
-        <p:spPr/>
-        <p:txBody>
-          <a:bodyPr/>
-          <a:lstStyle/>
-          <a:p>
-            <a:r>
-              <a:t>This is the screen, and it is a live capture — that call scored risk 100 out of 100 on the on-device engine and was labelled fake police. Notice what it does not do. It does not block the call. It does not claim you are being scammed, because we may be wrong. It asks one question a frightened person can answer honestly, and offers three exits: verify, call family, or send it anyway — and *anyway* is honoured, and it still teaches the model. On a feature phone the same pause is a voice prompt with two keys. Warn, never block, because a wrong warning costs one screen and a right one keeps 30,000 taka. On the on-device engine this call scored risk 100/100 and was labelled ভুয়া পুলিশ / মামলা.</a:t>
-            </a:r>
-          </a:p>
-          <a:p/>
-          <a:p>
-            <a:r>
-              <a:t>— Scoring: Solution strength &amp; clarity — the intervention itself, and the restraint inside it</a:t>
-            </a:r>
-          </a:p>
-          <a:p>
-            <a:r>
-              <a:t>— If asked: Q&amp;A 2 — false positives: three gates, and warn-never-block means a wrong answer costs one screen.</a:t>
-            </a:r>
-          </a:p>
-        </p:txBody>
-      </p:sp>
-      <p:sp>
-        <p:nvSpPr>
-          <p:cNvPr id="4" name="Slide Number Placeholder 3"/>
-          <p:cNvSpPr>
-            <a:spLocks noGrp="1"/>
-          </p:cNvSpPr>
-          <p:nvPr>
-            <p:ph type="sldNum" idx="5" sz="quarter"/>
-          </p:nvPr>
-        </p:nvSpPr>
-        <p:spPr/>
-      </p:sp>
-    </p:spTree>
-  </p:cSld>
-  <p:clrMapOvr>
-    <a:masterClrMapping/>
-  </p:clrMapOvr>
-</p:notes>
-</file>
-
-<file path=ppt/notesSlides/notesSlide7.xml><?xml version="1.0" encoding="utf-8"?>
-<p:notes xmlns:a="http://schemas.openxmlformats.org/drawingml/2006/main" xmlns:p="http://schemas.openxmlformats.org/presentationml/2006/main" xmlns:r="http://schemas.openxmlformats.org/officeDocument/2006/relationships">
-  <p:cSld>
-    <p:spTree>
-      <p:nvGrpSpPr>
-        <p:cNvPr id="1" name=""/>
-        <p:cNvGrpSpPr/>
-        <p:nvPr/>
-      </p:nvGrpSpPr>
-      <p:grpSpPr>
-        <a:xfrm>
-          <a:off x="0" y="0"/>
-          <a:ext cx="0" cy="0"/>
-          <a:chOff x="0" y="0"/>
-          <a:chExt cx="0" cy="0"/>
-        </a:xfrm>
-      </p:grpSpPr>
-      <p:sp>
-        <p:nvSpPr>
-          <p:cNvPr id="2" name="Slide Image Placeholder 1"/>
-          <p:cNvSpPr>
-            <a:spLocks noGrp="1"/>
-          </p:cNvSpPr>
-          <p:nvPr>
-            <p:ph type="sldImg" idx="2"/>
-          </p:nvPr>
-        </p:nvSpPr>
-        <p:spPr/>
-      </p:sp>
-      <p:sp>
-        <p:nvSpPr>
-          <p:cNvPr id="3" name="Notes Placeholder 2"/>
-          <p:cNvSpPr>
-            <a:spLocks noGrp="1"/>
-          </p:cNvSpPr>
-          <p:nvPr>
-            <p:ph type="body" idx="3" sz="quarter"/>
-          </p:nvPr>
-        </p:nvSpPr>
-        <p:spPr/>
-        <p:txBody>
-          <a:bodyPr/>
-          <a:lstStyle/>
-          <a:p>
-            <a:r>
-              <a:t>The claim you should test: the classifier does not look for the word OTP. It looks for pressure — authority claimed, a child in trouble, urgency, a demand for silence — and then an ask. Any one of those is normal conversation; the combination is the signature, and rewording does not escape it because the signals are semantic. Two gates sit on top: the situation multiplies the score, and nothing fires without an actual ask. I measured rather than hoped — ten ordinary sentences in friendly context produce zero pauses; five reworded scam scripts produce four. The reason it must run on the handset is not only privacy: 68 million subscribers are not on 4G, and a rural handset cannot round-trip to a cloud model inside a three-minute window. Any one of those eight signals is normal conversation; the combination is the signature. The hosted model carries only the generative part — a spoken story into a filed complaint — and never decides the interruption alone.</a:t>
-            </a:r>
-          </a:p>
-          <a:p/>
-          <a:p>
-            <a:r>
-              <a:t>— Scoring: AI application &amp; technical rationale — semantic signals over a word list, and why they must run on the handset</a:t>
-            </a:r>
-          </a:p>
-          <a:p>
-            <a:r>
-              <a:t>— If asked: Q&amp;A 3 — a scoring function, not a neural net: the contract is the design work, the corpus is the ask.</a:t>
-            </a:r>
-          </a:p>
-        </p:txBody>
-      </p:sp>
-      <p:sp>
-        <p:nvSpPr>
-          <p:cNvPr id="4" name="Slide Number Placeholder 3"/>
-          <p:cNvSpPr>
-            <a:spLocks noGrp="1"/>
-          </p:cNvSpPr>
-          <p:nvPr>
-            <p:ph type="sldNum" idx="5" sz="quarter"/>
-          </p:nvPr>
-        </p:nvSpPr>
-        <p:spPr/>
-      </p:sp>
-    </p:spTree>
-  </p:cSld>
-  <p:clrMapOvr>
-    <a:masterClrMapping/>
-  </p:clrMapOvr>
-</p:notes>
-</file>
-
-<file path=ppt/notesSlides/notesSlide8.xml><?xml version="1.0" encoding="utf-8"?>
-<p:notes xmlns:a="http://schemas.openxmlformats.org/drawingml/2006/main" xmlns:p="http://schemas.openxmlformats.org/presentationml/2006/main" xmlns:r="http://schemas.openxmlformats.org/officeDocument/2006/relationships">
-  <p:cSld>
-    <p:spTree>
-      <p:nvGrpSpPr>
-        <p:cNvPr id="1" name=""/>
-        <p:cNvGrpSpPr/>
-        <p:nvPr/>
-      </p:nvGrpSpPr>
-      <p:grpSpPr>
-        <a:xfrm>
-          <a:off x="0" y="0"/>
-          <a:ext cx="0" cy="0"/>
-          <a:chOff x="0" y="0"/>
-          <a:chExt cx="0" cy="0"/>
-        </a:xfrm>
-      </p:grpSpPr>
-      <p:sp>
-        <p:nvSpPr>
-          <p:cNvPr id="2" name="Slide Image Placeholder 1"/>
-          <p:cNvSpPr>
-            <a:spLocks noGrp="1"/>
-          </p:cNvSpPr>
-          <p:nvPr>
-            <p:ph type="sldImg" idx="2"/>
-          </p:nvPr>
-        </p:nvSpPr>
-        <p:spPr/>
-      </p:sp>
-      <p:sp>
-        <p:nvSpPr>
-          <p:cNvPr id="3" name="Notes Placeholder 2"/>
-          <p:cNvSpPr>
-            <a:spLocks noGrp="1"/>
-          </p:cNvSpPr>
-          <p:nvPr>
-            <p:ph type="body" idx="3" sz="quarter"/>
-          </p:nvPr>
-        </p:nvSpPr>
-        <p:spPr/>
-        <p:txBody>
-          <a:bodyPr/>
-          <a:lstStyle/>
-          <a:p>
-            <a:r>
-              <a:t>The subscriber pays 20 taka a month, Grameenphone bills it as an ordinary value-added pack, and we supply the model, the engine and the report standard. Year one at one percent attach on GP's base is 209 million taka — small money for an operator, which is honest, and the bigger line is cost avoided: fraud refunds, contact-centre minutes, and the churn that follows a publicised loss in a wallet holding 182.7 billion taka of float. One percent is not a hope: Truecaller converts 0.75 percent of its free base into paid subscribers, and Verizon sells the weaker version of this product — caller blocking — at four dollars a month. Our margin is structural: inference runs on the handset, so serving a warning costs no cloud call.</a:t>
-            </a:r>
-          </a:p>
-          <a:p/>
-          <a:p>
-            <a:r>
-              <a:t>— Scoring: Feasibility, scalability &amp; business sense — who pays, what they pay for, and evidence that people pay for this</a:t>
-            </a:r>
-          </a:p>
-          <a:p>
-            <a:r>
-              <a:t>— If asked: Q&amp;A 15 — will anyone pay for safety: Truecaller's measured 0.75% conversion, and Verizon's price point.</a:t>
-            </a:r>
-          </a:p>
-        </p:txBody>
-      </p:sp>
-      <p:sp>
-        <p:nvSpPr>
-          <p:cNvPr id="4" name="Slide Number Placeholder 3"/>
-          <p:cNvSpPr>
-            <a:spLocks noGrp="1"/>
-          </p:cNvSpPr>
-          <p:nvPr>
-            <p:ph type="sldNum" idx="5" sz="quarter"/>
-          </p:nvPr>
-        </p:nvSpPr>
-        <p:spPr/>
-      </p:sp>
-    </p:spTree>
-  </p:cSld>
-  <p:clrMapOvr>
-    <a:masterClrMapping/>
-  </p:clrMapOvr>
-</p:notes>
-</file>
-
-<file path=ppt/notesSlides/notesSlide9.xml><?xml version="1.0" encoding="utf-8"?>
-<p:notes xmlns:a="http://schemas.openxmlformats.org/drawingml/2006/main" xmlns:p="http://schemas.openxmlformats.org/presentationml/2006/main" xmlns:r="http://schemas.openxmlformats.org/officeDocument/2006/relationships">
-  <p:cSld>
-    <p:spTree>
-      <p:nvGrpSpPr>
-        <p:cNvPr id="1" name=""/>
-        <p:cNvGrpSpPr/>
-        <p:nvPr/>
-      </p:nvGrpSpPr>
-      <p:grpSpPr>
-        <a:xfrm>
-          <a:off x="0" y="0"/>
-          <a:ext cx="0" cy="0"/>
-          <a:chOff x="0" y="0"/>
-          <a:chExt cx="0" cy="0"/>
-        </a:xfrm>
-      </p:grpSpPr>
-      <p:sp>
-        <p:nvSpPr>
-          <p:cNvPr id="2" name="Slide Image Placeholder 1"/>
-          <p:cNvSpPr>
-            <a:spLocks noGrp="1"/>
-          </p:cNvSpPr>
-          <p:nvPr>
-            <p:ph type="sldImg" idx="2"/>
-          </p:nvPr>
-        </p:nvSpPr>
-        <p:spPr/>
-      </p:sp>
-      <p:sp>
-        <p:nvSpPr>
-          <p:cNvPr id="3" name="Notes Placeholder 2"/>
-          <p:cNvSpPr>
-            <a:spLocks noGrp="1"/>
-          </p:cNvSpPr>
-          <p:nvPr>
-            <p:ph type="body" idx="3" sz="quarter"/>
-          </p:nvPr>
-        </p:nvSpPr>
-        <p:spPr/>
-        <p:txBody>
-          <a:bodyPr/>
-          <a:lstStyle/>
-          <a:p>
-            <a:r>
-              <a:t>The sizing is arithmetic you can redo on a napkin: 191 million subscribers at 20 taka a month is 45.9 billion taka, GP's own base is 20.9 billion, and a one percent attach is 209 million in year one. I want to be explicit that the price and the attach rate are our assumptions — no Bangladeshi willingness-to-pay survey covers this category, and I will not pretend one does. The sequencing matters more than the number: phase one is the pre-call network warning, because it needs no handset software, no upgrade and no app store, so it reaches all 87 million subscribers on the day it switches on.</a:t>
-            </a:r>
-          </a:p>
-          <a:p/>
-          <a:p>
-            <a:r>
-              <a:t>— Scoring: Market analysis &amp; scalability — sizing a judge can redo on a napkin, and a go-to-market that is sequenced</a:t>
-            </a:r>
-          </a:p>
-          <a:p>
-            <a:r>
-              <a:t>— If asked: Q&amp;A 18 and 19 — the growth path past Grameenphone, and the national fraud-loss figure we refuse to invent.</a:t>
-            </a:r>
-          </a:p>
-        </p:txBody>
-      </p:sp>
-      <p:sp>
-        <p:nvSpPr>
-          <p:cNvPr id="4" name="Slide Number Placeholder 3"/>
-          <p:cNvSpPr>
-            <a:spLocks noGrp="1"/>
-          </p:cNvSpPr>
-          <p:nvPr>
-            <p:ph type="sldNum" idx="5" sz="quarter"/>
-          </p:nvPr>
-        </p:nvSpPr>
-        <p:spPr/>
-      </p:sp>
-    </p:spTree>
-  </p:cSld>
-  <p:clrMapOvr>
-    <a:masterClrMapping/>
-  </p:clrMapOvr>
-</p:notes>
 </file>
 
 <file path=ppt/slideLayouts/slideLayout1.xml><?xml version="1.0" encoding="utf-8"?>
@@ -6214,7 +4811,7 @@
                 <a:ea typeface="Segoe UI"/>
                 <a:cs typeface="Segoe UI"/>
               </a:rPr>
-              <a:t>Bangladesh Bank, MFS statistics: transactions table 9, accounts table 8, July 2026 — bb.org.bd/econdata/fin_digitalfstat</a:t>
+              <a:t>Bangladesh Bank, MFS statistics: transactions table 9, accounts table 8, 2026 — bb.org.bd/econdata/fin_digitalfstat</a:t>
             </a:r>
           </a:p>
         </p:txBody>
@@ -6438,7 +5035,7 @@
                 <a:ea typeface="Segoe UI"/>
                 <a:cs typeface="Segoe UI"/>
               </a:rPr>
-              <a:t>122.71M on 4G · 69.18% internet</a:t>
+              <a:t>122.71M on 4G · 69.18% mobile-internet penetration</a:t>
             </a:r>
           </a:p>
         </p:txBody>
@@ -7387,7 +5984,7 @@
                 <a:ea typeface="Segoe UI"/>
                 <a:cs typeface="Segoe UI"/>
               </a:rPr>
-              <a:t>Sensitivity, and what it costs to serve.</a:t>
+              <a:t>Sensitivity — what revenue could look like.</a:t>
             </a:r>
           </a:p>
         </p:txBody>
@@ -7431,7 +6028,7 @@
                 <a:ea typeface="Segoe UI"/>
                 <a:cs typeface="Segoe UI"/>
               </a:rPr>
-              <a:t>GP BASE OF 87.20M SUBSCRIBERS, AT Tk 20 A MONTH</a:t>
+              <a:t>GROSS REVENUE POTENTIAL, NOT PROFIT · 87.20M GP BASELINE · Tk 20 ASSUMED PRICE</a:t>
             </a:r>
           </a:p>
         </p:txBody>
@@ -8239,7 +6836,7 @@
                 <a:ea typeface="Segoe UI"/>
                 <a:cs typeface="Segoe UI"/>
               </a:rPr>
-              <a:t>COST TO SERVE</a:t>
+              <a:t>EXPECTED COST ADVANTAGES</a:t>
             </a:r>
           </a:p>
         </p:txBody>
@@ -8417,6 +7014,61 @@
         </p:nvSpPr>
         <p:spPr>
           <a:xfrm>
+            <a:off x="658368" y="5843016"/>
+            <a:ext cx="5440680" cy="292608"/>
+          </a:xfrm>
+          <a:prstGeom prst="rect">
+            <a:avLst/>
+          </a:prstGeom>
+          <a:noFill/>
+        </p:spPr>
+        <p:txBody>
+          <a:bodyPr wrap="square" lIns="0" rIns="0" tIns="0" bIns="0" anchor="t">
+            <a:spAutoFit/>
+          </a:bodyPr>
+          <a:lstStyle/>
+          <a:p>
+            <a:pPr algn="l">
+              <a:spcBef>
+                <a:spcPts val="0"/>
+              </a:spcBef>
+              <a:spcAft>
+                <a:spcPts val="0"/>
+              </a:spcAft>
+            </a:pPr>
+            <a:r>
+              <a:rPr sz="1200" b="1" i="0">
+                <a:solidFill>
+                  <a:srgbClr val="93A6BA"/>
+                </a:solidFill>
+                <a:latin typeface="Segoe UI"/>
+                <a:ea typeface="Segoe UI"/>
+                <a:cs typeface="Segoe UI"/>
+              </a:rPr>
+              <a:t>—  </a:t>
+            </a:r>
+            <a:r>
+              <a:rPr sz="1200" b="0" i="0">
+                <a:solidFill>
+                  <a:srgbClr val="EEF3F8"/>
+                </a:solidFill>
+                <a:latin typeface="Segoe UI"/>
+                <a:ea typeface="Segoe UI"/>
+                <a:cs typeface="Segoe UI"/>
+              </a:rPr>
+              <a:t>not yet measured: USSD and airtime, support, model updates</a:t>
+            </a:r>
+          </a:p>
+        </p:txBody>
+      </p:sp>
+      <p:sp>
+        <p:nvSpPr>
+          <p:cNvPr id="30" name="TextBox 29"/>
+          <p:cNvSpPr txBox="1"/>
+          <p:nvPr/>
+        </p:nvSpPr>
+        <p:spPr>
+          <a:xfrm>
             <a:off x="6309360" y="4617720"/>
             <a:ext cx="5223967" cy="237744"/>
           </a:xfrm>
@@ -8448,14 +7100,14 @@
                 <a:ea typeface="Segoe UI"/>
                 <a:cs typeface="Segoe UI"/>
               </a:rPr>
-              <a:t>WHY GP WOULD BUY IT</a:t>
-            </a:r>
-          </a:p>
-        </p:txBody>
-      </p:sp>
-      <p:sp>
-        <p:nvSpPr>
-          <p:cNvPr id="30" name="TextBox 29"/>
+              <a:t>WHAT GP STANDS TO GAIN — TO BE MEASURED</a:t>
+            </a:r>
+          </a:p>
+        </p:txBody>
+      </p:sp>
+      <p:sp>
+        <p:nvSpPr>
+          <p:cNvPr id="31" name="TextBox 30"/>
           <p:cNvSpPr txBox="1"/>
           <p:nvPr/>
         </p:nvSpPr>
@@ -8510,7 +7162,7 @@
       </p:sp>
       <p:sp>
         <p:nvSpPr>
-          <p:cNvPr id="31" name="TextBox 30"/>
+          <p:cNvPr id="32" name="TextBox 31"/>
           <p:cNvSpPr txBox="1"/>
           <p:nvPr/>
         </p:nvSpPr>
@@ -8565,7 +7217,7 @@
       </p:sp>
       <p:sp>
         <p:nvSpPr>
-          <p:cNvPr id="32" name="TextBox 31"/>
+          <p:cNvPr id="33" name="TextBox 32"/>
           <p:cNvSpPr txBox="1"/>
           <p:nvPr/>
         </p:nvSpPr>
@@ -8620,7 +7272,7 @@
       </p:sp>
       <p:sp>
         <p:nvSpPr>
-          <p:cNvPr id="33" name="TextBox 32"/>
+          <p:cNvPr id="34" name="TextBox 33"/>
           <p:cNvSpPr txBox="1"/>
           <p:nvPr/>
         </p:nvSpPr>
@@ -8738,7 +7390,7 @@
                 <a:ea typeface="Segoe UI"/>
                 <a:cs typeface="Segoe UI"/>
               </a:rPr>
-              <a:t>APPENDIX · Q&amp;A PREPARATION</a:t>
+              <a:t>APPENDIX · BACKUP: JUDGE Q&amp;A</a:t>
             </a:r>
           </a:p>
         </p:txBody>
@@ -8936,7 +7588,7 @@
                 <a:ea typeface="Segoe UI"/>
                 <a:cs typeface="Segoe UI"/>
               </a:rPr>
-              <a:t>If the three minutes go to the market.</a:t>
+              <a:t>What each question is really asking.</a:t>
             </a:r>
           </a:p>
         </p:txBody>
@@ -9026,7 +7678,7 @@
                 <a:ea typeface="Segoe UI"/>
                 <a:cs typeface="Segoe UI"/>
               </a:rPr>
-              <a:t>How big is it?</a:t>
+              <a:t>Revenue opportunity?</a:t>
             </a:r>
           </a:p>
         </p:txBody>
@@ -9070,7 +7722,7 @@
                 <a:ea typeface="Segoe UI"/>
                 <a:cs typeface="Segoe UI"/>
               </a:rPr>
-              <a:t>Tk 45.9B TAM · Tk 20.9B on GP's base · calculated</a:t>
+              <a:t>Tk 45.9B all operators · Tk 20.9B on GP's base — gross, before cost</a:t>
             </a:r>
           </a:p>
         </p:txBody>
@@ -9160,7 +7812,7 @@
                 <a:ea typeface="Segoe UI"/>
                 <a:cs typeface="Segoe UI"/>
               </a:rPr>
-              <a:t>Who pays?</a:t>
+              <a:t>Tk 20 and 1% — on what basis?</a:t>
             </a:r>
           </a:p>
         </p:txBody>
@@ -9204,7 +7856,7 @@
                 <a:ea typeface="Segoe UI"/>
                 <a:cs typeface="Segoe UI"/>
               </a:rPr>
-              <a:t>the subscriber, billed by Grameenphone as a Tk 20 pack</a:t>
+              <a:t>Truecaller 0.75% conversion, global; our 1% is a target only</a:t>
             </a:r>
           </a:p>
         </p:txBody>
@@ -9294,7 +7946,7 @@
                 <a:ea typeface="Segoe UI"/>
                 <a:cs typeface="Segoe UI"/>
               </a:rPr>
-              <a:t>Will anyone pay?</a:t>
+              <a:t>No-app phones — how?</a:t>
             </a:r>
           </a:p>
         </p:txBody>
@@ -9338,7 +7990,7 @@
                 <a:ea typeface="Segoe UI"/>
                 <a:cs typeface="Segoe UI"/>
               </a:rPr>
-              <a:t>Truecaller converts 0.75%; we assume 1% of an opt-in base</a:t>
+              <a:t>GP signals before the ring; the Bangla listening is on the handset</a:t>
             </a:r>
           </a:p>
         </p:txBody>
@@ -9428,7 +8080,7 @@
                 <a:ea typeface="Segoe UI"/>
                 <a:cs typeface="Segoe UI"/>
               </a:rPr>
-              <a:t>Why not just an app?</a:t>
+              <a:t>Prototype vs production?</a:t>
             </a:r>
           </a:p>
         </p:txBody>
@@ -9472,7 +8124,7 @@
                 <a:ea typeface="Segoe UI"/>
                 <a:cs typeface="Segoe UI"/>
               </a:rPr>
-              <a:t>the phone at risk is a Tk 800 button phone — it needs the network</a:t>
+              <a:t>this demo uses a hosted model; production runs on the handset</a:t>
             </a:r>
           </a:p>
         </p:txBody>
@@ -9562,7 +8214,7 @@
                 <a:ea typeface="Segoe UI"/>
                 <a:cs typeface="Segoe UI"/>
               </a:rPr>
-              <a:t>Why Grameenphone?</a:t>
+              <a:t>What still costs money?</a:t>
             </a:r>
           </a:p>
         </p:txBody>
@@ -9606,7 +8258,7 @@
                 <a:ea typeface="Segoe UI"/>
                 <a:cs typeface="Segoe UI"/>
               </a:rPr>
-              <a:t>warn before the ring, and reputation without a cold start</a:t>
+              <a:t>USSD and airtime, complaint handling, updates, support — unmeasured</a:t>
             </a:r>
           </a:p>
         </p:txBody>
@@ -9696,7 +8348,7 @@
                 <a:ea typeface="Segoe UI"/>
                 <a:cs typeface="Segoe UI"/>
               </a:rPr>
-              <a:t>Cost to serve?</a:t>
+              <a:t>GP nets more than it spends?</a:t>
             </a:r>
           </a:p>
         </p:txBody>
@@ -9740,7 +8392,7 @@
                 <a:ea typeface="Segoe UI"/>
                 <a:cs typeface="Segoe UI"/>
               </a:rPr>
-              <a:t>on-device inference: a warning costs no cloud call</a:t>
+              <a:t>unknown today — the 90-day pilot exists to show it</a:t>
             </a:r>
           </a:p>
         </p:txBody>
@@ -9830,7 +8482,7 @@
                 <a:ea typeface="Segoe UI"/>
                 <a:cs typeface="Segoe UI"/>
               </a:rPr>
-              <a:t>Past GP?</a:t>
+              <a:t>Do people pay for this?</a:t>
             </a:r>
           </a:p>
         </p:txBody>
@@ -9874,7 +8526,7 @@
                 <a:ea typeface="Segoe UI"/>
                 <a:cs typeface="Segoe UI"/>
               </a:rPr>
-              <a:t>a shared report standard, then operators, MFS and BTRC</a:t>
+              <a:t>evidence users pay for safety, not proof of this price point</a:t>
             </a:r>
           </a:p>
         </p:txBody>
@@ -9964,7 +8616,7 @@
                 <a:ea typeface="Segoe UI"/>
                 <a:cs typeface="Segoe UI"/>
               </a:rPr>
-              <a:t>What would stop us?</a:t>
+              <a:t>What would change the plan?</a:t>
             </a:r>
           </a:p>
         </p:txBody>
@@ -10008,7 +8660,7 @@
                 <a:ea typeface="Segoe UI"/>
                 <a:cs typeface="Segoe UI"/>
               </a:rPr>
-              <a:t>if four weeks of real Bangla speech cannot hold the false-positive rate</a:t>
+              <a:t>real Bangla speech that cannot hold the false-positive rate</a:t>
             </a:r>
           </a:p>
         </p:txBody>
@@ -10052,7 +8704,7 @@
                 <a:ea typeface="Segoe UI"/>
                 <a:cs typeface="Segoe UI"/>
               </a:rPr>
-              <a:t>The full bank of twenty-three questions, with the criterion each one scores, is in pitch/deck-and-qa.md and in the notes pane of every slide.</a:t>
+              <a:t>Every figure above traces to Appendix A1. The price and attach rate are our assumptions, not surveyed willingness to pay.</a:t>
             </a:r>
           </a:p>
         </p:txBody>
@@ -11791,7 +10443,7 @@
                 <a:ea typeface="Segoe UI"/>
                 <a:cs typeface="Segoe UI"/>
               </a:rPr>
-              <a:t>built for volume, not for one persuasive voice</a:t>
+              <a:t>built for volume, rarely for one persuasive voice</a:t>
             </a:r>
           </a:p>
         </p:txBody>
@@ -11969,7 +10621,7 @@
                 <a:ea typeface="Segoe UI"/>
                 <a:cs typeface="Segoe UI"/>
               </a:rPr>
-              <a:t>a fresh SIM costs Tk 200</a:t>
+              <a:t>a new SIM can cost as little as Tk 200</a:t>
             </a:r>
           </a:p>
         </p:txBody>
@@ -12503,7 +11155,7 @@
                 <a:ea typeface="Segoe UI"/>
                 <a:cs typeface="Segoe UI"/>
               </a:rPr>
-              <a:t>the target phone is a Tk 800 button phone</a:t>
+              <a:t>the phone at risk costs about Tk 1,000</a:t>
             </a:r>
           </a:p>
         </p:txBody>
@@ -13071,7 +11723,7 @@
                 <a:ea typeface="Segoe UI"/>
                 <a:cs typeface="Segoe UI"/>
               </a:rPr>
-              <a:t>MFS volume</a:t>
+              <a:t>MFS value / month</a:t>
             </a:r>
           </a:p>
         </p:txBody>
@@ -13182,7 +11834,7 @@
                 <a:ea typeface="Segoe UI"/>
                 <a:cs typeface="Segoe UI"/>
               </a:rPr>
-              <a:t>e-money float</a:t>
+              <a:t>e-money balance</a:t>
             </a:r>
           </a:p>
         </p:txBody>
@@ -13264,7 +11916,7 @@
               </a:spcAft>
             </a:pPr>
             <a:r>
-              <a:rPr sz="2700" b="1" i="0">
+              <a:rPr sz="2400" b="1" i="0">
                 <a:solidFill>
                   <a:srgbClr val="F5B53F"/>
                 </a:solidFill>
@@ -13293,7 +11945,7 @@
                 <a:ea typeface="Segoe UI"/>
                 <a:cs typeface="Segoe UI"/>
               </a:rPr>
-              <a:t>MFS accounts</a:t>
+              <a:t>registered accounts</a:t>
             </a:r>
           </a:p>
         </p:txBody>
@@ -13706,7 +12358,7 @@
                 <a:ea typeface="Segoe UI"/>
                 <a:cs typeface="Segoe UI"/>
               </a:rPr>
-              <a:t>1.03 billion MFS transactions in one month</a:t>
+              <a:t>over a billion MFS transactions in a month</a:t>
             </a:r>
           </a:p>
         </p:txBody>
@@ -13761,7 +12413,7 @@
                 <a:ea typeface="Segoe UI"/>
                 <a:cs typeface="Segoe UI"/>
               </a:rPr>
-              <a:t>130.2M MFS accounts are rural</a:t>
+              <a:t>130.2M registered MFS accounts are rural</a:t>
             </a:r>
           </a:p>
         </p:txBody>
@@ -13860,7 +12512,7 @@
                 <a:ea typeface="Segoe UI"/>
                 <a:cs typeface="Segoe UI"/>
               </a:rPr>
-              <a:t>Bangladesh Bank MFS statistics (July 2026) · BTRC mobile subscribers (August 2026) · links and what is calculated: Appendix A1</a:t>
+              <a:t>Bangladesh Bank MFS statistics, Tables 9 and 8 (2026) · BTRC subscribers (Aug 2026) · links and what is calculated: Appendix A1</a:t>
             </a:r>
           </a:p>
         </p:txBody>
@@ -17411,7 +16063,7 @@
                 <a:ea typeface="Segoe UI"/>
                 <a:cs typeface="Segoe UI"/>
               </a:rPr>
-              <a:t>backend checks pass offline</a:t>
+              <a:t>backend checks, not accuracy</a:t>
             </a:r>
           </a:p>
         </p:txBody>
@@ -17450,7 +16102,7 @@
               </a:spcAft>
             </a:pPr>
             <a:r>
-              <a:rPr sz="1400" b="1" i="0">
+              <a:rPr sz="1200" b="1" i="0">
                 <a:solidFill>
                   <a:srgbClr val="F5B53F"/>
                 </a:solidFill>
@@ -17458,7 +16110,7 @@
                 <a:ea typeface="Segoe UI"/>
                 <a:cs typeface="Segoe UI"/>
               </a:rPr>
-              <a:t>On the handset. No cloud call, no per-call bill.</a:t>
+              <a:t>Preliminary: 15 test sentences, no real calls yet. On the handset — no cloud call.</a:t>
             </a:r>
           </a:p>
         </p:txBody>
@@ -20483,324 +19135,4 @@
   </a:objectDefaults>
   <a:extraClrSchemeLst/>
 </a:theme>
-</file>
-
-<file path=ppt/theme/theme2.xml><?xml version="1.0" encoding="utf-8"?>
-<a:theme xmlns:a="http://schemas.openxmlformats.org/drawingml/2006/main" name="Office Theme">
-  <a:themeElements>
-    <a:clrScheme name="Office">
-      <a:dk1>
-        <a:sysClr val="windowText" lastClr="000000"/>
-      </a:dk1>
-      <a:lt1>
-        <a:sysClr val="window" lastClr="FFFFFF"/>
-      </a:lt1>
-      <a:dk2>
-        <a:srgbClr val="1F497D"/>
-      </a:dk2>
-      <a:lt2>
-        <a:srgbClr val="EEECE1"/>
-      </a:lt2>
-      <a:accent1>
-        <a:srgbClr val="4F81BD"/>
-      </a:accent1>
-      <a:accent2>
-        <a:srgbClr val="C0504D"/>
-      </a:accent2>
-      <a:accent3>
-        <a:srgbClr val="9BBB59"/>
-      </a:accent3>
-      <a:accent4>
-        <a:srgbClr val="8064A2"/>
-      </a:accent4>
-      <a:accent5>
-        <a:srgbClr val="4BACC6"/>
-      </a:accent5>
-      <a:accent6>
-        <a:srgbClr val="F79646"/>
-      </a:accent6>
-      <a:hlink>
-        <a:srgbClr val="0000FF"/>
-      </a:hlink>
-      <a:folHlink>
-        <a:srgbClr val="800080"/>
-      </a:folHlink>
-    </a:clrScheme>
-    <a:fontScheme name="Office">
-      <a:majorFont>
-        <a:latin typeface="Calibri"/>
-        <a:ea typeface=""/>
-        <a:cs typeface=""/>
-        <a:font script="Jpan" typeface="ＭＳ Ｐゴシック"/>
-        <a:font script="Hang" typeface="맑은 고딕"/>
-        <a:font script="Hans" typeface="宋体"/>
-        <a:font script="Hant" typeface="新細明體"/>
-        <a:font script="Arab" typeface="Times New Roman"/>
-        <a:font script="Hebr" typeface="Times New Roman"/>
-        <a:font script="Thai" typeface="Angsana New"/>
-        <a:font script="Ethi" typeface="Nyala"/>
-        <a:font script="Beng" typeface="Vrinda"/>
-        <a:font script="Gujr" typeface="Shruti"/>
-        <a:font script="Khmr" typeface="MoolBoran"/>
-        <a:font script="Knda" typeface="Tunga"/>
-        <a:font script="Guru" typeface="Raavi"/>
-        <a:font script="Cans" typeface="Euphemia"/>
-        <a:font script="Cher" typeface="Plantagenet Cherokee"/>
-        <a:font script="Yiii" typeface="Microsoft Yi Baiti"/>
-        <a:font script="Tibt" typeface="Microsoft Himalaya"/>
-        <a:font script="Thaa" typeface="MV Boli"/>
-        <a:font script="Deva" typeface="Mangal"/>
-        <a:font script="Telu" typeface="Gautami"/>
-        <a:font script="Taml" typeface="Latha"/>
-        <a:font script="Syrc" typeface="Estrangelo Edessa"/>
-        <a:font script="Orya" typeface="Kalinga"/>
-        <a:font script="Mlym" typeface="Kartika"/>
-        <a:font script="Laoo" typeface="DokChampa"/>
-        <a:font script="Sinh" typeface="Iskoola Pota"/>
-        <a:font script="Mong" typeface="Mongolian Baiti"/>
-        <a:font script="Viet" typeface="Times New Roman"/>
-        <a:font script="Uigh" typeface="Microsoft Uighur"/>
-        <a:font script="Geor" typeface="Sylfaen"/>
-      </a:majorFont>
-      <a:minorFont>
-        <a:latin typeface="Calibri"/>
-        <a:ea typeface=""/>
-        <a:cs typeface=""/>
-        <a:font script="Jpan" typeface="ＭＳ Ｐゴシック"/>
-        <a:font script="Hang" typeface="맑은 고딕"/>
-        <a:font script="Hans" typeface="宋体"/>
-        <a:font script="Hant" typeface="新細明體"/>
-        <a:font script="Arab" typeface="Arial"/>
-        <a:font script="Hebr" typeface="Arial"/>
-        <a:font script="Thai" typeface="Cordia New"/>
-        <a:font script="Ethi" typeface="Nyala"/>
-        <a:font script="Beng" typeface="Vrinda"/>
-        <a:font script="Gujr" typeface="Shruti"/>
-        <a:font script="Khmr" typeface="DaunPenh"/>
-        <a:font script="Knda" typeface="Tunga"/>
-        <a:font script="Guru" typeface="Raavi"/>
-        <a:font script="Cans" typeface="Euphemia"/>
-        <a:font script="Cher" typeface="Plantagenet Cherokee"/>
-        <a:font script="Yiii" typeface="Microsoft Yi Baiti"/>
-        <a:font script="Tibt" typeface="Microsoft Himalaya"/>
-        <a:font script="Thaa" typeface="MV Boli"/>
-        <a:font script="Deva" typeface="Mangal"/>
-        <a:font script="Telu" typeface="Gautami"/>
-        <a:font script="Taml" typeface="Latha"/>
-        <a:font script="Syrc" typeface="Estrangelo Edessa"/>
-        <a:font script="Orya" typeface="Kalinga"/>
-        <a:font script="Mlym" typeface="Kartika"/>
-        <a:font script="Laoo" typeface="DokChampa"/>
-        <a:font script="Sinh" typeface="Iskoola Pota"/>
-        <a:font script="Mong" typeface="Mongolian Baiti"/>
-        <a:font script="Viet" typeface="Arial"/>
-        <a:font script="Uigh" typeface="Microsoft Uighur"/>
-        <a:font script="Geor" typeface="Sylfaen"/>
-      </a:minorFont>
-    </a:fontScheme>
-    <a:fmtScheme name="Office">
-      <a:fillStyleLst>
-        <a:solidFill>
-          <a:schemeClr val="phClr"/>
-        </a:solidFill>
-        <a:gradFill rotWithShape="1">
-          <a:gsLst>
-            <a:gs pos="0">
-              <a:schemeClr val="phClr">
-                <a:tint val="50000"/>
-                <a:satMod val="300000"/>
-              </a:schemeClr>
-            </a:gs>
-            <a:gs pos="35000">
-              <a:schemeClr val="phClr">
-                <a:tint val="37000"/>
-                <a:satMod val="300000"/>
-              </a:schemeClr>
-            </a:gs>
-            <a:gs pos="100000">
-              <a:schemeClr val="phClr">
-                <a:tint val="15000"/>
-                <a:satMod val="350000"/>
-              </a:schemeClr>
-            </a:gs>
-          </a:gsLst>
-          <a:lin ang="16200000" scaled="1"/>
-        </a:gradFill>
-        <a:gradFill rotWithShape="1">
-          <a:gsLst>
-            <a:gs pos="0">
-              <a:schemeClr val="phClr">
-                <a:tint val="100000"/>
-                <a:shade val="100000"/>
-                <a:satMod val="130000"/>
-              </a:schemeClr>
-            </a:gs>
-            <a:gs pos="100000">
-              <a:schemeClr val="phClr">
-                <a:tint val="50000"/>
-                <a:shade val="100000"/>
-                <a:satMod val="350000"/>
-              </a:schemeClr>
-            </a:gs>
-          </a:gsLst>
-          <a:lin ang="16200000" scaled="0"/>
-        </a:gradFill>
-      </a:fillStyleLst>
-      <a:lnStyleLst>
-        <a:ln w="9525" cap="flat" cmpd="sng" algn="ctr">
-          <a:solidFill>
-            <a:schemeClr val="phClr">
-              <a:shade val="95000"/>
-              <a:satMod val="105000"/>
-            </a:schemeClr>
-          </a:solidFill>
-          <a:prstDash val="solid"/>
-        </a:ln>
-        <a:ln w="25400" cap="flat" cmpd="sng" algn="ctr">
-          <a:solidFill>
-            <a:schemeClr val="phClr"/>
-          </a:solidFill>
-          <a:prstDash val="solid"/>
-        </a:ln>
-        <a:ln w="38100" cap="flat" cmpd="sng" algn="ctr">
-          <a:solidFill>
-            <a:schemeClr val="phClr"/>
-          </a:solidFill>
-          <a:prstDash val="solid"/>
-        </a:ln>
-      </a:lnStyleLst>
-      <a:effectStyleLst>
-        <a:effectStyle>
-          <a:effectLst>
-            <a:outerShdw blurRad="40000" dist="20000" dir="5400000" rotWithShape="0">
-              <a:srgbClr val="000000">
-                <a:alpha val="38000"/>
-              </a:srgbClr>
-            </a:outerShdw>
-          </a:effectLst>
-        </a:effectStyle>
-        <a:effectStyle>
-          <a:effectLst>
-            <a:outerShdw blurRad="40000" dist="23000" dir="5400000" rotWithShape="0">
-              <a:srgbClr val="000000">
-                <a:alpha val="35000"/>
-              </a:srgbClr>
-            </a:outerShdw>
-          </a:effectLst>
-        </a:effectStyle>
-        <a:effectStyle>
-          <a:effectLst>
-            <a:outerShdw blurRad="40000" dist="23000" dir="5400000" rotWithShape="0">
-              <a:srgbClr val="000000">
-                <a:alpha val="35000"/>
-              </a:srgbClr>
-            </a:outerShdw>
-          </a:effectLst>
-          <a:scene3d>
-            <a:camera prst="orthographicFront">
-              <a:rot lat="0" lon="0" rev="0"/>
-            </a:camera>
-            <a:lightRig rig="threePt" dir="t">
-              <a:rot lat="0" lon="0" rev="1200000"/>
-            </a:lightRig>
-          </a:scene3d>
-          <a:sp3d>
-            <a:bevelT w="63500" h="25400"/>
-          </a:sp3d>
-        </a:effectStyle>
-      </a:effectStyleLst>
-      <a:bgFillStyleLst>
-        <a:solidFill>
-          <a:schemeClr val="phClr"/>
-        </a:solidFill>
-        <a:gradFill rotWithShape="1">
-          <a:gsLst>
-            <a:gs pos="0">
-              <a:schemeClr val="phClr">
-                <a:tint val="40000"/>
-                <a:satMod val="350000"/>
-              </a:schemeClr>
-            </a:gs>
-            <a:gs pos="40000">
-              <a:schemeClr val="phClr">
-                <a:tint val="45000"/>
-                <a:shade val="99000"/>
-                <a:satMod val="350000"/>
-              </a:schemeClr>
-            </a:gs>
-            <a:gs pos="100000">
-              <a:schemeClr val="phClr">
-                <a:shade val="20000"/>
-                <a:satMod val="255000"/>
-              </a:schemeClr>
-            </a:gs>
-          </a:gsLst>
-          <a:path path="circle">
-            <a:fillToRect l="50000" t="-80000" r="50000" b="180000"/>
-          </a:path>
-        </a:gradFill>
-        <a:gradFill rotWithShape="1">
-          <a:gsLst>
-            <a:gs pos="0">
-              <a:schemeClr val="phClr">
-                <a:tint val="80000"/>
-                <a:satMod val="300000"/>
-              </a:schemeClr>
-            </a:gs>
-            <a:gs pos="100000">
-              <a:schemeClr val="phClr">
-                <a:shade val="30000"/>
-                <a:satMod val="200000"/>
-              </a:schemeClr>
-            </a:gs>
-          </a:gsLst>
-          <a:path path="circle">
-            <a:fillToRect l="50000" t="50000" r="50000" b="50000"/>
-          </a:path>
-        </a:gradFill>
-      </a:bgFillStyleLst>
-    </a:fmtScheme>
-  </a:themeElements>
-  <a:objectDefaults>
-    <a:spDef>
-      <a:spPr/>
-      <a:bodyPr/>
-      <a:lstStyle/>
-      <a:style>
-        <a:lnRef idx="1">
-          <a:schemeClr val="accent1"/>
-        </a:lnRef>
-        <a:fillRef idx="3">
-          <a:schemeClr val="accent1"/>
-        </a:fillRef>
-        <a:effectRef idx="2">
-          <a:schemeClr val="accent1"/>
-        </a:effectRef>
-        <a:fontRef idx="minor">
-          <a:schemeClr val="lt1"/>
-        </a:fontRef>
-      </a:style>
-    </a:spDef>
-    <a:lnDef>
-      <a:spPr/>
-      <a:bodyPr/>
-      <a:lstStyle/>
-      <a:style>
-        <a:lnRef idx="2">
-          <a:schemeClr val="accent1"/>
-        </a:lnRef>
-        <a:fillRef idx="0">
-          <a:schemeClr val="accent1"/>
-        </a:fillRef>
-        <a:effectRef idx="1">
-          <a:schemeClr val="accent1"/>
-        </a:effectRef>
-        <a:fontRef idx="minor">
-          <a:schemeClr val="tx1"/>
-        </a:fontRef>
-      </a:style>
-    </a:lnDef>
-  </a:objectDefaults>
-  <a:extraClrSchemeLst/>
-</a:theme>
 </file>
--- a/pitch/Shotorko-GP-FutureMakers-2026.pptx
+++ b/pitch/Shotorko-GP-FutureMakers-2026.pptx
@@ -4105,7 +4105,7 @@
                 <a:ea typeface="Segoe UI"/>
                 <a:cs typeface="Segoe UI"/>
               </a:rPr>
-              <a:t>one USSD gating test on *21</a:t>
+              <a:t>one divert-gating test: ##002# erasure, *#21# status</a:t>
             </a:r>
           </a:p>
         </p:txBody>
@@ -5213,7 +5213,7 @@
                 <a:ea typeface="Segoe UI"/>
                 <a:cs typeface="Segoe UI"/>
               </a:rPr>
-              <a:t>Truecaller AB, 10 March 2026 — news.cision.com/truecaller-ab/r/truecaller-surpasses-4-million-premium-subscribers,c4318816</a:t>
+              <a:t>Truecaller AB, 10 March 2026 (global, Q4 2025 figures) — corporate.truecaller.com/newsroom/press-release/truecaller-surpasses-4-million-premium-subscribers</a:t>
             </a:r>
           </a:p>
         </p:txBody>
@@ -17444,7 +17444,7 @@
                 <a:ea typeface="Segoe UI"/>
                 <a:cs typeface="Segoe UI"/>
               </a:rPr>
-              <a:t>Truecaller: 4M+ paying subscribers, 0.75% of free users convert (Mar 2026)</a:t>
+              <a:t>Truecaller: 4M+ paying subscribers, 0.75% convert — global, not Bangladeshi</a:t>
             </a:r>
           </a:p>
         </p:txBody>

--- a/pitch/Shotorko-GP-FutureMakers-2026.pptx
+++ b/pitch/Shotorko-GP-FutureMakers-2026.pptx
@@ -11612,7 +11612,7 @@
                 <a:ea typeface="Segoe UI"/>
                 <a:cs typeface="Segoe UI"/>
               </a:rPr>
-              <a:t>MOBILE FINANCIAL SERVICES — BANGLADESH BANK, JULY 2026  ·  SUBSCRIBERS — BTRC, AUGUST 2026</a:t>
+              <a:t>MOBILE FINANCIAL SERVICES — BANGLADESH BANK, TABLES 9 AND 8  ·  SUBSCRIBERS — BTRC, AUGUST 2026</a:t>
             </a:r>
           </a:p>
         </p:txBody>
@@ -18703,7 +18703,7 @@
                 <a:ea typeface="Segoe UI"/>
                 <a:cs typeface="Segoe UI"/>
               </a:rPr>
-              <a:t>Denominators: BTRC subscribers (Aug 2026), Bangladesh Bank MFS (Jul 2026). The Tk 20 price and the 1% attach rate are our assumptions, not a surveyed willingness to pay.</a:t>
+              <a:t>Denominators: BTRC subscribers (Aug 2026), Bangladesh Bank MFS Tables 9 and 8. The Tk 20 price and the 1% attach rate are our assumptions, not a surveyed willingness to pay.</a:t>
             </a:r>
           </a:p>
         </p:txBody>
